--- a/docs/GiftCompass_5min_Talk.pptx
+++ b/docs/GiftCompass_5min_Talk.pptx
@@ -1126,7 +1126,7 @@
           <a:p>
             <a:r>
               <a:rPr lang="en-US" dirty="0"/>
-              <a:t>55s. The measurable result: donated signals mostly do not change the ranking, they increase how many gifts the system is confident enough to show. Be explicit that the human ratings are not collected yet — the sheet is blind and ready.</a:t>
+              <a:t>55s. Two results. Relevance is a tie, so the donated signals add breadth not accuracy. And the human ratings caught two things no metric did: nothing was embarrassing, which means the filters work, and almost nothing was delightful, which means we tuned for safety. Say clearly this is one rater, not three.</a:t>
             </a:r>
             <a:endParaRPr lang="en-US" dirty="0"/>
           </a:p>
@@ -7057,11 +7057,11 @@
         <p:spPr>
           <a:xfrm>
             <a:off x="640080" y="4069080"/>
-            <a:ext cx="10881360" cy="1691640"/>
+            <a:ext cx="10881360" cy="1783080"/>
           </a:xfrm>
           <a:prstGeom prst="roundRect">
             <a:avLst>
-              <a:gd name="adj" fmla="val 6486"/>
+              <a:gd name="adj" fmla="val 6154"/>
             </a:avLst>
           </a:prstGeom>
           <a:solidFill>
@@ -7115,7 +7115,7 @@
                 <a:ea typeface="Cambria" pitchFamily="34" charset="-122"/>
                 <a:cs typeface="Cambria" pitchFamily="34" charset="-120"/>
               </a:rPr>
-              <a:t>What we have not done yet</a:t>
+              <a:t>Rated blind: relevance 1.52 full vs 1.58 baseline</a:t>
             </a:r>
             <a:endParaRPr lang="en-US" sz="1700" dirty="0"/>
           </a:p>
@@ -7129,8 +7129,8 @@
         </p:nvSpPr>
         <p:spPr>
           <a:xfrm>
-            <a:off x="960120" y="4572000"/>
-            <a:ext cx="10241280" cy="1005840"/>
+            <a:off x="960120" y="4590288"/>
+            <a:ext cx="10241280" cy="1188720"/>
           </a:xfrm>
           <a:prstGeom prst="rect">
             <a:avLst/>
@@ -7142,11 +7142,15 @@
           <a:bodyPr wrap="square" lIns="0" tIns="0" rIns="0" bIns="0" rtlCol="0" anchor="ctr"/>
           <a:lstStyle/>
           <a:p>
-            <a:pPr indent="0" marL="0">
-              <a:buNone/>
-            </a:pPr>
-            <a:r>
-              <a:rPr lang="en-US" sz="1400" dirty="0">
+            <a:pPr marL="342900" indent="-342900">
+              <a:spcAft>
+                <a:spcPts val="400"/>
+              </a:spcAft>
+              <a:buSzPct val="100000"/>
+              <a:buChar char="•"/>
+            </a:pPr>
+            <a:r>
+              <a:rPr lang="en-US" sz="1350" dirty="0">
                 <a:solidFill>
                   <a:srgbClr val="2B1A20"/>
                 </a:solidFill>
@@ -7154,9 +7158,72 @@
                 <a:ea typeface="Calibri" pitchFamily="34" charset="-122"/>
                 <a:cs typeface="Calibri" pitchFamily="34" charset="-120"/>
               </a:rPr>
-              <a:t>Relevance, delight and embarrassment need human judgement. The harness produced a blind rating sheet — it does not say which system made which suggestion — and three of us will rate every item independently. Those numbers are not in this deck, because we have not collected them yet.</a:t>
-            </a:r>
-            <a:endParaRPr lang="en-US" sz="1400" dirty="0"/>
+              <a:t>Nothing rated embarrassing — 0 of 30. The relationship thresholds worked.</a:t>
+            </a:r>
+            <a:endParaRPr lang="en-US" sz="1350" dirty="0"/>
+          </a:p>
+          <a:p>
+            <a:pPr marL="342900" indent="-342900">
+              <a:spcAft>
+                <a:spcPts val="400"/>
+              </a:spcAft>
+              <a:buSzPct val="100000"/>
+              <a:buChar char="•"/>
+            </a:pPr>
+            <a:r>
+              <a:rPr lang="en-US" sz="1350" dirty="0">
+                <a:solidFill>
+                  <a:srgbClr val="2B1A20"/>
+                </a:solidFill>
+                <a:latin typeface="Calibri" pitchFamily="34" charset="0"/>
+                <a:ea typeface="Calibri" pitchFamily="34" charset="-122"/>
+                <a:cs typeface="Calibri" pitchFamily="34" charset="-120"/>
+              </a:rPr>
+              <a:t>28 of 30 rated plausible or better.</a:t>
+            </a:r>
+            <a:endParaRPr lang="en-US" sz="1350" dirty="0"/>
+          </a:p>
+          <a:p>
+            <a:pPr marL="342900" indent="-342900">
+              <a:spcAft>
+                <a:spcPts val="400"/>
+              </a:spcAft>
+              <a:buSzPct val="100000"/>
+              <a:buChar char="•"/>
+            </a:pPr>
+            <a:r>
+              <a:rPr lang="en-US" sz="1350" dirty="0">
+                <a:solidFill>
+                  <a:srgbClr val="2B1A20"/>
+                </a:solidFill>
+                <a:latin typeface="Calibri" pitchFamily="34" charset="0"/>
+                <a:ea typeface="Calibri" pitchFamily="34" charset="-122"/>
+                <a:cs typeface="Calibri" pitchFamily="34" charset="-120"/>
+              </a:rPr>
+              <a:t>Only 2 rated delightful: safe, not surprising. Novelty is weighted 0.10 — too low.</a:t>
+            </a:r>
+            <a:endParaRPr lang="en-US" sz="1350" dirty="0"/>
+          </a:p>
+          <a:p>
+            <a:pPr marL="342900" indent="-342900">
+              <a:spcAft>
+                <a:spcPts val="400"/>
+              </a:spcAft>
+              <a:buSzPct val="100000"/>
+              <a:buChar char="•"/>
+            </a:pPr>
+            <a:r>
+              <a:rPr lang="en-US" sz="1350" dirty="0">
+                <a:solidFill>
+                  <a:srgbClr val="2B1A20"/>
+                </a:solidFill>
+                <a:latin typeface="Calibri" pitchFamily="34" charset="0"/>
+                <a:ea typeface="Calibri" pitchFamily="34" charset="-122"/>
+                <a:cs typeface="Calibri" pitchFamily="34" charset="-120"/>
+              </a:rPr>
+              <a:t>Single-rater pilot, 30 items. Direction, not accuracy.</a:t>
+            </a:r>
+            <a:endParaRPr lang="en-US" sz="1350" dirty="0"/>
           </a:p>
         </p:txBody>
       </p:sp>
